--- a/docs/SML-2026-Brand-Catalog.pptx
+++ b/docs/SML-2026-Brand-Catalog.pptx
@@ -31386,7 +31386,7 @@
                 <a:ea typeface="Calibri Light" pitchFamily="34" charset="-122"/>
                 <a:cs typeface="Calibri Light" pitchFamily="34" charset="-120"/>
               </a:rPr>
-              <a:t>$165</a:t>
+              <a:t>$350</a:t>
             </a:r>
             <a:endParaRPr lang="en-US" sz="840" dirty="0"/>
           </a:p>
@@ -32644,7 +32644,7 @@
                 <a:ea typeface="Calibri Light" pitchFamily="34" charset="-122"/>
                 <a:cs typeface="Calibri Light" pitchFamily="34" charset="-120"/>
               </a:rPr>
-              <a:t>$75</a:t>
+              <a:t>$450</a:t>
             </a:r>
             <a:endParaRPr lang="en-US" sz="840" dirty="0"/>
           </a:p>

--- a/docs/SML-2026-Brand-Catalog.pptx
+++ b/docs/SML-2026-Brand-Catalog.pptx
@@ -27097,7 +27097,7 @@
                 <a:ea typeface="Calibri Light" pitchFamily="34" charset="-122"/>
                 <a:cs typeface="Calibri Light" pitchFamily="34" charset="-120"/>
               </a:rPr>
-              <a:t>$65 – $85</a:t>
+              <a:t>$195 – $450</a:t>
             </a:r>
             <a:endParaRPr lang="en-US" sz="900" dirty="0"/>
           </a:p>
@@ -29114,7 +29114,7 @@
                 <a:ea typeface="Calibri Light" pitchFamily="34" charset="-122"/>
                 <a:cs typeface="Calibri Light" pitchFamily="34" charset="-120"/>
               </a:rPr>
-              <a:t>$185 – $210</a:t>
+              <a:t>$850 – $895</a:t>
             </a:r>
             <a:endParaRPr lang="en-US" sz="1010" dirty="0"/>
           </a:p>
@@ -29451,7 +29451,7 @@
                 <a:ea typeface="Calibri Light" pitchFamily="34" charset="-122"/>
                 <a:cs typeface="Calibri Light" pitchFamily="34" charset="-120"/>
               </a:rPr>
-              <a:t>$230 – $255</a:t>
+              <a:t>$950 – $995</a:t>
             </a:r>
             <a:endParaRPr lang="en-US" sz="1010" dirty="0"/>
           </a:p>
@@ -29788,7 +29788,7 @@
                 <a:ea typeface="Calibri Light" pitchFamily="34" charset="-122"/>
                 <a:cs typeface="Calibri Light" pitchFamily="34" charset="-120"/>
               </a:rPr>
-              <a:t>$255 – $280</a:t>
+              <a:t>$1,050 – $1,100</a:t>
             </a:r>
             <a:endParaRPr lang="en-US" sz="1010" dirty="0"/>
           </a:p>
@@ -32014,7 +32014,7 @@
                 <a:ea typeface="Calibri Light" pitchFamily="34" charset="-122"/>
                 <a:cs typeface="Calibri Light" pitchFamily="34" charset="-120"/>
               </a:rPr>
-              <a:t>$195</a:t>
+              <a:t>$495</a:t>
             </a:r>
             <a:endParaRPr lang="en-US" sz="840" dirty="0"/>
           </a:p>
@@ -34485,7 +34485,7 @@
                 <a:ea typeface="Calibri Light" pitchFamily="34" charset="-122"/>
                 <a:cs typeface="Calibri Light" pitchFamily="34" charset="-120"/>
               </a:rPr>
-              <a:t>$95</a:t>
+              <a:t>$450</a:t>
             </a:r>
             <a:endParaRPr lang="en-US" sz="1690" dirty="0"/>
           </a:p>
@@ -35237,7 +35237,7 @@
                 <a:ea typeface="Calibri Light" pitchFamily="34" charset="-122"/>
                 <a:cs typeface="Calibri Light" pitchFamily="34" charset="-120"/>
               </a:rPr>
-              <a:t>$45</a:t>
+              <a:t>$195</a:t>
             </a:r>
             <a:endParaRPr lang="en-US" sz="1690" dirty="0"/>
           </a:p>
@@ -35989,7 +35989,7 @@
                 <a:ea typeface="Calibri Light" pitchFamily="34" charset="-122"/>
                 <a:cs typeface="Calibri Light" pitchFamily="34" charset="-120"/>
               </a:rPr>
-              <a:t>$135</a:t>
+              <a:t>$650</a:t>
             </a:r>
             <a:endParaRPr lang="en-US" sz="1690" dirty="0"/>
           </a:p>
@@ -36741,7 +36741,7 @@
                 <a:ea typeface="Calibri Light" pitchFamily="34" charset="-122"/>
                 <a:cs typeface="Calibri Light" pitchFamily="34" charset="-120"/>
               </a:rPr>
-              <a:t>$35</a:t>
+              <a:t>$150</a:t>
             </a:r>
             <a:endParaRPr lang="en-US" sz="1690" dirty="0"/>
           </a:p>
@@ -37413,7 +37413,7 @@
                 <a:ea typeface="Calibri Light" pitchFamily="34" charset="-122"/>
                 <a:cs typeface="Calibri Light" pitchFamily="34" charset="-120"/>
               </a:rPr>
-              <a:t>$35 — $135</a:t>
+              <a:t>$150 — $650</a:t>
             </a:r>
             <a:endParaRPr lang="en-US" sz="900" dirty="0"/>
           </a:p>

--- a/docs/SML-2026-Brand-Catalog.pptx
+++ b/docs/SML-2026-Brand-Catalog.pptx
@@ -17048,7 +17048,7 @@
                 <a:ea typeface="Calibri" pitchFamily="34" charset="-122"/>
                 <a:cs typeface="Calibri" pitchFamily="34" charset="-120"/>
               </a:rPr>
-              <a:t>orders@selfmadelegendsz.com  ·  [ ADD PHONE NUMBER ]</a:t>
+              <a:t>orders@selfmadelegendsz.com  ·  +1 (816) 466-3083</a:t>
             </a:r>
             <a:endParaRPr lang="en-US" sz="730" dirty="0"/>
           </a:p>
